--- a/02-CCNA-200-301-v7/01-CCNA-IntroducaoAsRedes-v7.02/01-Modulo01-PPTS/Modulo06-CamadaDeEnlace.pptx
+++ b/02-CCNA-200-301-v7/01-CCNA-IntroducaoAsRedes-v7.02/01-Modulo01-PPTS/Modulo06-CamadaDeEnlace.pptx
@@ -27548,7 +27548,7 @@
         </p:nvSpPr>
         <p:spPr>
           <a:xfrm>
-            <a:off x="416425" y="1244338"/>
+            <a:off x="416425" y="1657088"/>
             <a:ext cx="7598042" cy="1473462"/>
           </a:xfrm>
         </p:spPr>
@@ -27566,7 +27566,7 @@
                   </a:schemeClr>
                 </a:solidFill>
               </a:rPr>
-              <a:t>6.1 Finalidade da camada de enlace de dados</a:t>
+              <a:t>6.1 Finalidade da Camada de Enlace de Dados</a:t>
             </a:r>
             <a:endParaRPr lang="pt-BR">
               <a:solidFill>

--- a/02-CCNA-200-301-v7/01-CCNA-IntroducaoAsRedes-v7.02/01-Modulo01-PPTS/Modulo06-CamadaDeEnlace.pptx
+++ b/02-CCNA-200-301-v7/01-CCNA-IntroducaoAsRedes-v7.02/01-Modulo01-PPTS/Modulo06-CamadaDeEnlace.pptx
@@ -24027,7 +24027,7 @@
         </p:nvSpPr>
         <p:spPr>
           <a:xfrm>
-            <a:off x="469497" y="2316480"/>
+            <a:off x="469497" y="1808480"/>
             <a:ext cx="6672708" cy="1080143"/>
           </a:xfrm>
         </p:spPr>
@@ -24060,23 +24060,213 @@
       </p:sp>
       <p:sp>
         <p:nvSpPr>
-          <p:cNvPr id="7" name="Subtitle 6"/>
-          <p:cNvSpPr>
-            <a:spLocks noGrp="1"/>
-          </p:cNvSpPr>
-          <p:nvPr>
-            <p:ph type="subTitle" idx="1"/>
-          </p:nvPr>
+          <p:cNvPr id="4" name="Subtitle 6"/>
+          <p:cNvSpPr txBox="1"/>
+          <p:nvPr/>
         </p:nvSpPr>
         <p:spPr>
           <a:xfrm>
-            <a:off x="469497" y="3809526"/>
+            <a:off x="469497" y="3646043"/>
             <a:ext cx="2368954" cy="902174"/>
           </a:xfrm>
+          <a:prstGeom prst="rect">
+            <a:avLst/>
+          </a:prstGeom>
         </p:spPr>
         <p:txBody>
-          <a:bodyPr/>
-          <a:lstStyle/>
+          <a:bodyPr lIns="91420" tIns="45710" rIns="91420" bIns="45710" anchor="b" anchorCtr="0">
+            <a:noAutofit/>
+          </a:bodyPr>
+          <a:lstStyle>
+            <a:lvl1pPr marL="0" indent="0" algn="l" defTabSz="684530" rtl="0" eaLnBrk="1" fontAlgn="base" hangingPunct="1">
+              <a:lnSpc>
+                <a:spcPct val="95000"/>
+              </a:lnSpc>
+              <a:spcBef>
+                <a:spcPts val="1075"/>
+              </a:spcBef>
+              <a:spcAft>
+                <a:spcPct val="0"/>
+              </a:spcAft>
+              <a:buClr>
+                <a:schemeClr val="tx2"/>
+              </a:buClr>
+              <a:buSzPct val="90000"/>
+              <a:buFont typeface="Arial" panose="020B0604020202020204" pitchFamily="34" charset="0"/>
+              <a:buNone/>
+              <a:defRPr lang="en-US" sz="1200" b="0" i="0" kern="1200">
+                <a:solidFill>
+                  <a:schemeClr val="accent5"/>
+                </a:solidFill>
+                <a:latin typeface="+mn-lt"/>
+                <a:ea typeface="MS PGothic" charset="0"/>
+                <a:cs typeface="CiscoSans"/>
+              </a:defRPr>
+            </a:lvl1pPr>
+            <a:lvl2pPr marL="342900" indent="0" algn="ctr" defTabSz="684530" rtl="0" eaLnBrk="1" fontAlgn="base" hangingPunct="1">
+              <a:lnSpc>
+                <a:spcPct val="95000"/>
+              </a:lnSpc>
+              <a:spcBef>
+                <a:spcPts val="600"/>
+              </a:spcBef>
+              <a:spcAft>
+                <a:spcPct val="0"/>
+              </a:spcAft>
+              <a:buClr>
+                <a:schemeClr val="tx2"/>
+              </a:buClr>
+              <a:buFont typeface="Arial" panose="020B0604020202020204" pitchFamily="34" charset="0"/>
+              <a:buNone/>
+              <a:defRPr lang="en-US" sz="1400" kern="1200">
+                <a:solidFill>
+                  <a:schemeClr val="tx1">
+                    <a:tint val="75000"/>
+                  </a:schemeClr>
+                </a:solidFill>
+                <a:latin typeface="+mn-lt"/>
+                <a:ea typeface="MS PGothic" charset="0"/>
+                <a:cs typeface="CiscoSans"/>
+              </a:defRPr>
+            </a:lvl2pPr>
+            <a:lvl3pPr marL="685800" indent="0" algn="ctr" defTabSz="684530" rtl="0" eaLnBrk="1" fontAlgn="base" hangingPunct="1">
+              <a:lnSpc>
+                <a:spcPct val="95000"/>
+              </a:lnSpc>
+              <a:spcBef>
+                <a:spcPts val="625"/>
+              </a:spcBef>
+              <a:spcAft>
+                <a:spcPct val="0"/>
+              </a:spcAft>
+              <a:buFont typeface="Arial" panose="020B0604020202020204" pitchFamily="34" charset="0"/>
+              <a:buNone/>
+              <a:defRPr lang="en-US" sz="1200" kern="1200">
+                <a:solidFill>
+                  <a:schemeClr val="tx1">
+                    <a:tint val="75000"/>
+                  </a:schemeClr>
+                </a:solidFill>
+                <a:latin typeface="+mn-lt"/>
+                <a:ea typeface="MS PGothic" charset="0"/>
+                <a:cs typeface="CiscoSans"/>
+              </a:defRPr>
+            </a:lvl3pPr>
+            <a:lvl4pPr marL="1028700" indent="0" algn="ctr" defTabSz="684530" rtl="0" eaLnBrk="1" fontAlgn="base" hangingPunct="1">
+              <a:lnSpc>
+                <a:spcPct val="95000"/>
+              </a:lnSpc>
+              <a:spcBef>
+                <a:spcPts val="625"/>
+              </a:spcBef>
+              <a:spcAft>
+                <a:spcPct val="0"/>
+              </a:spcAft>
+              <a:buFont typeface="Arial" panose="020B0604020202020204" pitchFamily="34" charset="0"/>
+              <a:buNone/>
+              <a:defRPr lang="en-US" sz="1100" kern="1200">
+                <a:solidFill>
+                  <a:schemeClr val="tx1">
+                    <a:tint val="75000"/>
+                  </a:schemeClr>
+                </a:solidFill>
+                <a:latin typeface="+mn-lt"/>
+                <a:ea typeface="MS PGothic" charset="0"/>
+                <a:cs typeface="CiscoSans"/>
+              </a:defRPr>
+            </a:lvl4pPr>
+            <a:lvl5pPr marL="1371600" indent="0" algn="ctr" defTabSz="684530" rtl="0" eaLnBrk="1" fontAlgn="base" hangingPunct="1">
+              <a:lnSpc>
+                <a:spcPct val="95000"/>
+              </a:lnSpc>
+              <a:spcBef>
+                <a:spcPts val="625"/>
+              </a:spcBef>
+              <a:spcAft>
+                <a:spcPct val="0"/>
+              </a:spcAft>
+              <a:buFont typeface="Arial" panose="020B0604020202020204" pitchFamily="34" charset="0"/>
+              <a:buNone/>
+              <a:defRPr lang="en-US" sz="1100" kern="1200">
+                <a:solidFill>
+                  <a:schemeClr val="tx1">
+                    <a:tint val="75000"/>
+                  </a:schemeClr>
+                </a:solidFill>
+                <a:latin typeface="+mn-lt"/>
+                <a:ea typeface="MS PGothic" charset="0"/>
+                <a:cs typeface="CiscoSans"/>
+              </a:defRPr>
+            </a:lvl5pPr>
+            <a:lvl6pPr marL="1714500" indent="0" algn="ctr" defTabSz="685800" rtl="0" eaLnBrk="1" latinLnBrk="0" hangingPunct="1">
+              <a:spcBef>
+                <a:spcPts val="600"/>
+              </a:spcBef>
+              <a:buFont typeface="Arial" panose="020B0604020202020204" pitchFamily="34" charset="0"/>
+              <a:buNone/>
+              <a:defRPr sz="900" kern="1200" baseline="0">
+                <a:solidFill>
+                  <a:schemeClr val="tx1">
+                    <a:tint val="75000"/>
+                  </a:schemeClr>
+                </a:solidFill>
+                <a:latin typeface="+mn-lt"/>
+                <a:ea typeface="+mn-ea"/>
+                <a:cs typeface="+mn-cs"/>
+              </a:defRPr>
+            </a:lvl6pPr>
+            <a:lvl7pPr marL="2057400" indent="0" algn="ctr" defTabSz="685800" rtl="0" eaLnBrk="1" latinLnBrk="0" hangingPunct="1">
+              <a:spcBef>
+                <a:spcPts val="600"/>
+              </a:spcBef>
+              <a:buFont typeface="Arial" panose="020B0604020202020204" pitchFamily="34" charset="0"/>
+              <a:buNone/>
+              <a:defRPr sz="800" kern="1200" baseline="0">
+                <a:solidFill>
+                  <a:schemeClr val="tx1">
+                    <a:tint val="75000"/>
+                  </a:schemeClr>
+                </a:solidFill>
+                <a:latin typeface="+mn-lt"/>
+                <a:ea typeface="+mn-ea"/>
+                <a:cs typeface="+mn-cs"/>
+              </a:defRPr>
+            </a:lvl7pPr>
+            <a:lvl8pPr marL="2400300" indent="0" algn="ctr" defTabSz="685800" rtl="0" eaLnBrk="1" latinLnBrk="0" hangingPunct="1">
+              <a:spcBef>
+                <a:spcPct val="20000"/>
+              </a:spcBef>
+              <a:buFont typeface="Arial" panose="020B0604020202020204" pitchFamily="34" charset="0"/>
+              <a:buNone/>
+              <a:defRPr sz="1500" kern="1200">
+                <a:solidFill>
+                  <a:schemeClr val="tx1">
+                    <a:tint val="75000"/>
+                  </a:schemeClr>
+                </a:solidFill>
+                <a:latin typeface="+mn-lt"/>
+                <a:ea typeface="+mn-ea"/>
+                <a:cs typeface="+mn-cs"/>
+              </a:defRPr>
+            </a:lvl8pPr>
+            <a:lvl9pPr marL="2742565" indent="0" algn="ctr" defTabSz="685800" rtl="0" eaLnBrk="1" latinLnBrk="0" hangingPunct="1">
+              <a:spcBef>
+                <a:spcPct val="20000"/>
+              </a:spcBef>
+              <a:buFont typeface="Arial" panose="020B0604020202020204" pitchFamily="34" charset="0"/>
+              <a:buNone/>
+              <a:defRPr sz="1500" kern="1200">
+                <a:solidFill>
+                  <a:schemeClr val="tx1">
+                    <a:tint val="75000"/>
+                  </a:schemeClr>
+                </a:solidFill>
+                <a:latin typeface="+mn-lt"/>
+                <a:ea typeface="+mn-ea"/>
+                <a:cs typeface="+mn-cs"/>
+              </a:defRPr>
+            </a:lvl9pPr>
+          </a:lstStyle>
           <a:p>
             <a:pPr rtl="0"/>
             <a:r>
@@ -24100,6 +24290,18 @@
             </a:endParaRPr>
           </a:p>
           <a:p>
+            <a:r>
+              <a:rPr lang="pt-BR">
+                <a:solidFill>
+                  <a:schemeClr val="accent5">
+                    <a:lumMod val="40000"/>
+                    <a:lumOff val="60000"/>
+                  </a:schemeClr>
+                </a:solidFill>
+                <a:sym typeface="+mn-ea"/>
+              </a:rPr>
+              <a:t>Versão: 1.0 - 01/03/2026</a:t>
+            </a:r>
             <a:endParaRPr lang="en-US" dirty="0"/>
           </a:p>
         </p:txBody>
@@ -27566,7 +27768,7 @@
                   </a:schemeClr>
                 </a:solidFill>
               </a:rPr>
-              <a:t>6.1 Finalidade da Camada de Enlace de Dados</a:t>
+              <a:t>6.1 - Finalidade da Camada de Enlace de Dados</a:t>
             </a:r>
             <a:endParaRPr lang="pt-BR">
               <a:solidFill>
@@ -27921,7 +28123,7 @@
         <p:spPr>
           <a:xfrm>
             <a:off x="0" y="0"/>
-            <a:ext cx="8345488" cy="731837"/>
+            <a:ext cx="9144000" cy="731520"/>
           </a:xfrm>
         </p:spPr>
         <p:txBody>
@@ -27938,7 +28140,7 @@
             </a:br>
             <a:r>
               <a:rPr lang="pt-BR" sz="2400"/>
-              <a:t>A camada de vínculo de dados</a:t>
+              <a:t>A camada de Vínculo de Dados</a:t>
             </a:r>
             <a:endParaRPr lang="pt-BR" sz="2400"/>
           </a:p>
@@ -27956,84 +28158,188 @@
         </p:nvSpPr>
         <p:spPr>
           <a:xfrm>
-            <a:off x="431972" y="855419"/>
-            <a:ext cx="4140028" cy="3073946"/>
+            <a:off x="46355" y="731520"/>
+            <a:ext cx="3734435" cy="3850005"/>
           </a:xfrm>
         </p:spPr>
         <p:txBody>
           <a:bodyPr/>
           <a:lstStyle/>
           <a:p>
-            <a:pPr marL="342900" indent="-342900" algn="l" rtl="0">
+            <a:pPr marL="342900" indent="-342900" algn="just" rtl="0">
               <a:buFont typeface="Arial" panose="020B0604020202020204" pitchFamily="34" charset="0"/>
               <a:buChar char="•"/>
             </a:pPr>
             <a:r>
-              <a:rPr lang="pt-BR" sz="1600">
+              <a:rPr lang="pt-BR" sz="1700">
                 <a:solidFill>
                   <a:srgbClr val="000000"/>
                 </a:solidFill>
               </a:rPr>
-              <a:t>A camada Data Link é responsável pelas comunicações entre placas de interface de rede do dispositivo final.</a:t>
+              <a:t>A camada </a:t>
             </a:r>
-            <a:endParaRPr lang="pt-BR" sz="1600">
+            <a:r>
+              <a:rPr lang="pt-BR" sz="1700" b="1">
+                <a:solidFill>
+                  <a:srgbClr val="FF0000"/>
+                </a:solidFill>
+              </a:rPr>
+              <a:t>Data Link</a:t>
+            </a:r>
+            <a:r>
+              <a:rPr lang="pt-BR" sz="1700">
+                <a:solidFill>
+                  <a:srgbClr val="000000"/>
+                </a:solidFill>
+              </a:rPr>
+              <a:t> é responsável pelas comunicações entre </a:t>
+            </a:r>
+            <a:r>
+              <a:rPr lang="pt-BR" sz="1700" b="1">
+                <a:solidFill>
+                  <a:srgbClr val="0070C0"/>
+                </a:solidFill>
+              </a:rPr>
+              <a:t>Placas de Interface de Rede (NIC)</a:t>
+            </a:r>
+            <a:r>
+              <a:rPr lang="pt-BR" sz="1700">
+                <a:solidFill>
+                  <a:srgbClr val="000000"/>
+                </a:solidFill>
+              </a:rPr>
+              <a:t> do </a:t>
+            </a:r>
+            <a:r>
+              <a:rPr lang="pt-BR" sz="1700" b="1">
+                <a:solidFill>
+                  <a:srgbClr val="000000"/>
+                </a:solidFill>
+              </a:rPr>
+              <a:t>dispositivo final (Endpoint)</a:t>
+            </a:r>
+            <a:r>
+              <a:rPr lang="pt-BR" sz="1700">
+                <a:solidFill>
+                  <a:srgbClr val="000000"/>
+                </a:solidFill>
+              </a:rPr>
+              <a:t>.</a:t>
+            </a:r>
+            <a:endParaRPr lang="pt-BR" sz="1700">
               <a:solidFill>
                 <a:srgbClr val="000000"/>
               </a:solidFill>
             </a:endParaRPr>
           </a:p>
           <a:p>
-            <a:pPr marL="342900" indent="-342900" algn="l" rtl="0">
+            <a:pPr marL="342900" indent="-342900" algn="just" rtl="0">
               <a:buFont typeface="Arial" panose="020B0604020202020204" pitchFamily="34" charset="0"/>
               <a:buChar char="•"/>
             </a:pPr>
             <a:r>
-              <a:rPr lang="pt-BR" sz="1600">
+              <a:rPr lang="pt-BR" sz="1700">
                 <a:solidFill>
                   <a:srgbClr val="000000"/>
                 </a:solidFill>
               </a:rPr>
-              <a:t>Ele permite que os protocolos de camada superior acessem a mídia da camada física e encapsula pacotes da Camada 3 (IPv4 e IPv6) em Frames da Camada 2.</a:t>
+              <a:t>Ele permite que os </a:t>
             </a:r>
-            <a:endParaRPr lang="pt-BR" sz="1600">
+            <a:r>
+              <a:rPr lang="pt-BR" sz="1700" b="1">
+                <a:solidFill>
+                  <a:srgbClr val="FF0000"/>
+                </a:solidFill>
+              </a:rPr>
+              <a:t>protocolos de camada superior</a:t>
+            </a:r>
+            <a:r>
+              <a:rPr lang="pt-BR" sz="1700">
+                <a:solidFill>
+                  <a:srgbClr val="000000"/>
+                </a:solidFill>
+              </a:rPr>
+              <a:t> acessem a mídia da camada física e </a:t>
+            </a:r>
+            <a:r>
+              <a:rPr lang="pt-BR" sz="1700" b="1">
+                <a:solidFill>
+                  <a:srgbClr val="000000"/>
+                </a:solidFill>
+              </a:rPr>
+              <a:t>Encapsula Pacotes da Camada 3 (IPv4 e IPv6)</a:t>
+            </a:r>
+            <a:r>
+              <a:rPr lang="pt-BR" sz="1700">
+                <a:solidFill>
+                  <a:srgbClr val="000000"/>
+                </a:solidFill>
+              </a:rPr>
+              <a:t> em </a:t>
+            </a:r>
+            <a:r>
+              <a:rPr lang="pt-BR" sz="1700" b="1">
+                <a:solidFill>
+                  <a:srgbClr val="0070C0"/>
+                </a:solidFill>
+              </a:rPr>
+              <a:t>Frames (Quadros) da Camada 2.</a:t>
+            </a:r>
+            <a:endParaRPr lang="pt-BR" sz="1700" b="1">
+              <a:solidFill>
+                <a:srgbClr val="0070C0"/>
+              </a:solidFill>
+            </a:endParaRPr>
+          </a:p>
+          <a:p>
+            <a:pPr marL="342900" indent="-342900" algn="just" rtl="0">
+              <a:buFont typeface="Arial" panose="020B0604020202020204" pitchFamily="34" charset="0"/>
+              <a:buChar char="•"/>
+            </a:pPr>
+            <a:r>
+              <a:rPr lang="pt-BR" sz="1700">
+                <a:solidFill>
+                  <a:srgbClr val="000000"/>
+                </a:solidFill>
+              </a:rPr>
+              <a:t>Ele também executa a </a:t>
+            </a:r>
+            <a:r>
+              <a:rPr lang="pt-BR" sz="1700" b="1">
+                <a:solidFill>
+                  <a:srgbClr val="000000"/>
+                </a:solidFill>
+              </a:rPr>
+              <a:t>detecção de erros</a:t>
+            </a:r>
+            <a:r>
+              <a:rPr lang="pt-BR" sz="1700">
+                <a:solidFill>
+                  <a:srgbClr val="000000"/>
+                </a:solidFill>
+              </a:rPr>
+              <a:t> e rejeita quadros corrompidos.</a:t>
+            </a:r>
+            <a:endParaRPr lang="pt-BR" sz="1700">
               <a:solidFill>
                 <a:srgbClr val="000000"/>
               </a:solidFill>
             </a:endParaRPr>
           </a:p>
           <a:p>
-            <a:pPr marL="342900" indent="-342900" algn="l" rtl="0">
-              <a:buFont typeface="Arial" panose="020B0604020202020204" pitchFamily="34" charset="0"/>
-              <a:buChar char="•"/>
-            </a:pPr>
-            <a:r>
-              <a:rPr lang="pt-BR" sz="1600">
-                <a:solidFill>
-                  <a:srgbClr val="000000"/>
-                </a:solidFill>
-              </a:rPr>
-              <a:t>Ele também executa a detecção de erros e rejeita quadros corrompidos.</a:t>
-            </a:r>
-            <a:endParaRPr lang="pt-BR" sz="1600">
+            <a:pPr marL="0" indent="0" algn="just"/>
+            <a:endParaRPr lang="en-US" sz="1700" dirty="0">
               <a:solidFill>
                 <a:srgbClr val="000000"/>
               </a:solidFill>
             </a:endParaRPr>
           </a:p>
           <a:p>
-            <a:pPr marL="0" indent="0" algn="l"/>
-            <a:endParaRPr lang="en-US" sz="1600" dirty="0">
-              <a:solidFill>
-                <a:srgbClr val="000000"/>
-              </a:solidFill>
-            </a:endParaRPr>
-          </a:p>
-          <a:p>
-            <a:pPr marL="342900" indent="-342900" algn="l">
+            <a:pPr marL="342900" indent="-342900" algn="just">
               <a:buFont typeface="Arial" panose="020B0604020202020204" pitchFamily="34" charset="0"/>
               <a:buChar char="•"/>
             </a:pPr>
-            <a:endParaRPr lang="en-US" sz="1600" dirty="0">
+            <a:endParaRPr lang="en-US" sz="1700" dirty="0">
               <a:solidFill>
                 <a:srgbClr val="000000"/>
               </a:solidFill>
@@ -28150,7 +28456,7 @@
         </p:nvSpPr>
         <p:spPr>
           <a:xfrm>
-            <a:off x="197964" y="855419"/>
+            <a:off x="157324" y="855419"/>
             <a:ext cx="4305820" cy="3683530"/>
           </a:xfrm>
         </p:spPr>

--- a/02-CCNA-200-301-v7/01-CCNA-IntroducaoAsRedes-v7.02/01-Modulo01-PPTS/Modulo06-CamadaDeEnlace.pptx
+++ b/02-CCNA-200-301-v7/01-CCNA-IntroducaoAsRedes-v7.02/01-Modulo01-PPTS/Modulo06-CamadaDeEnlace.pptx
@@ -24045,7 +24045,7 @@
                   </a:schemeClr>
                 </a:solidFill>
               </a:rPr>
-              <a:t>Módulo 6: Camada de Link de Dados</a:t>
+              <a:t>Módulo 6: Camada de Enlace (Link) de Dados</a:t>
             </a:r>
             <a:endParaRPr lang="pt-BR">
               <a:solidFill>
